--- a/Rapid Cortex Internal Docs/Sales_Marketing/Pitch Decks/RapidCortex_PitchDeck07-26.pptx
+++ b/Rapid Cortex Internal Docs/Sales_Marketing/Pitch Decks/RapidCortex_PitchDeck07-26.pptx
@@ -1957,7 +1957,7 @@
                 <a:ea typeface="Arial" pitchFamily="34" charset="-122"/>
                 <a:cs typeface="Arial" pitchFamily="34" charset="-120"/>
               </a:rPr>
-              <a:t>RAPID CORTEX</a:t>
+              <a:t>NEXCORT IQ</a:t>
             </a:r>
             <a:endParaRPr lang="en-US" sz="4400" dirty="0">
               <a:gradFill flip="none" rotWithShape="1">
@@ -2011,7 +2011,7 @@
                 <a:latin typeface="Arial" panose="020B0604020202020204" pitchFamily="34" charset="0"/>
                 <a:cs typeface="Arial" panose="020B0604020202020204" pitchFamily="34" charset="0"/>
               </a:rPr>
-              <a:t>WHAT CHANGES WHEN RAPID CORTEX ENTERS THE CONVERSATION?</a:t>
+              <a:t>WHAT CHANGES WHEN NEXCORT IQ ENTERS THE CONVERSATION?</a:t>
             </a:r>
           </a:p>
         </p:txBody>
@@ -2446,7 +2446,7 @@
                 <a:ea typeface="Arial" pitchFamily="34" charset="-122"/>
                 <a:cs typeface="Arial" pitchFamily="34" charset="-120"/>
               </a:rPr>
-              <a:t>Rapid Cortex is built with CJIS-aware principles from day one.</a:t>
+              <a:t>NexCort iQ is built with CJIS-aware principles from day one.</a:t>
             </a:r>
             <a:endParaRPr lang="en-US" sz="1200" dirty="0"/>
           </a:p>
@@ -5218,7 +5218,7 @@
                 <a:ea typeface="Arial" pitchFamily="34" charset="-122"/>
                 <a:cs typeface="Arial" pitchFamily="34" charset="-120"/>
               </a:rPr>
-              <a:t>Rapid Cortex is the only platform built from the ground up for</a:t>
+              <a:t>NexCort iQ is the only platform built from the ground up for</a:t>
             </a:r>
             <a:endParaRPr lang="en-US" sz="1350" dirty="0"/>
           </a:p>
@@ -6640,7 +6640,7 @@
                 <a:ea typeface="Arial" pitchFamily="34" charset="-122"/>
                 <a:cs typeface="Arial" pitchFamily="34" charset="-120"/>
               </a:rPr>
-              <a:t>On November 4, a 20-year-old called 911 in Iberville Parish, Louisiana. A unit was dispatched. 43 minutes passed. The call was closed. No alert fired. No supervisor was notified. She did not survive. Rapid Cortex Response Continuity System (RCS) was built so this never happens again.</a:t>
+              <a:t>On November 4, a 20-year-old called 911 in Iberville Parish, Louisiana. A unit was dispatched. 43 minutes passed. The call was closed. No alert fired. No supervisor was notified. She did not survive. NexCort iQ Response Continuity System (RCS) was built so this never happens again.</a:t>
             </a:r>
             <a:endParaRPr lang="en-US" sz="1300" dirty="0"/>
           </a:p>
@@ -7555,7 +7555,7 @@
                 <a:ea typeface="Arial" pitchFamily="34" charset="-122"/>
                 <a:cs typeface="Arial" pitchFamily="34" charset="-120"/>
               </a:rPr>
-              <a:t>Rapid Cortex keeps every call protected from intake to on-scene arrival.</a:t>
+              <a:t>NexCort iQ keeps every call protected from intake to on-scene arrival.</a:t>
             </a:r>
             <a:endParaRPr lang="en-US" sz="1200" dirty="0"/>
           </a:p>
@@ -8352,7 +8352,7 @@
                 <a:ea typeface="Arial" pitchFamily="34" charset="-122"/>
                 <a:cs typeface="Arial" pitchFamily="34" charset="-120"/>
               </a:rPr>
-              <a:t>RAPID CORTEX</a:t>
+              <a:t>NEXCORT IQ</a:t>
             </a:r>
             <a:endParaRPr lang="en-US" sz="5800" dirty="0"/>
           </a:p>
@@ -11718,7 +11718,7 @@
                 <a:ea typeface="Arial" pitchFamily="34" charset="-122"/>
                 <a:cs typeface="Arial" pitchFamily="34" charset="-120"/>
               </a:rPr>
-              <a:t>Rapid Cortex works alongside your existing CAD, telephony, and workflows across five vertical markets — without replacing anything your team relies on.</a:t>
+              <a:t>NexCort iQ works alongside your existing CAD, telephony, and workflows across five vertical markets — without replacing anything your team relies on.</a:t>
             </a:r>
             <a:endParaRPr lang="en-US" sz="1150" dirty="0"/>
           </a:p>
@@ -12641,7 +12641,7 @@
                 <a:ea typeface="Arial" pitchFamily="34" charset="-122"/>
                 <a:cs typeface="Arial" pitchFamily="34" charset="-120"/>
               </a:rPr>
-              <a:t>Rapid Cortex enhances your existing CAD system, telephony, and workflows — without replacing anything your team already relies on.</a:t>
+              <a:t>NexCort iQ enhances your existing CAD system, telephony, and workflows — without replacing anything your team already relies on.</a:t>
             </a:r>
             <a:endParaRPr lang="en-US" sz="1150" dirty="0"/>
           </a:p>
